--- a/docs/DWMusicBrainz_Sustentacion_v2.pptx
+++ b/docs/DWMusicBrainz_Sustentacion_v2.pptx
@@ -2491,6 +2491,10 @@
             </a:outerShdw>
           </a:effectLst>
         </p:spPr>
+        <p:txBody>
+          <a:bodyPr/>
+          <a:p/>
+        </p:txBody>
       </p:sp>
       <p:sp>
         <p:nvSpPr>
@@ -2635,6 +2639,10 @@
             <a:prstDash val="solid"/>
           </a:ln>
         </p:spPr>
+        <p:txBody>
+          <a:bodyPr/>
+          <a:p/>
+        </p:txBody>
       </p:sp>
       <p:sp>
         <p:nvSpPr>
@@ -2775,6 +2783,10 @@
             </a:outerShdw>
           </a:effectLst>
         </p:spPr>
+        <p:txBody>
+          <a:bodyPr/>
+          <a:p/>
+        </p:txBody>
       </p:sp>
       <p:sp>
         <p:nvSpPr>
@@ -2925,6 +2937,10 @@
             <a:prstDash val="solid"/>
           </a:ln>
         </p:spPr>
+        <p:txBody>
+          <a:bodyPr/>
+          <a:p/>
+        </p:txBody>
       </p:sp>
       <p:pic>
         <p:nvPicPr>
@@ -2983,6 +2999,10 @@
             </a:outerShdw>
           </a:effectLst>
         </p:spPr>
+        <p:txBody>
+          <a:bodyPr/>
+          <a:p/>
+        </p:txBody>
       </p:sp>
       <p:sp>
         <p:nvSpPr>
@@ -3133,6 +3153,10 @@
             <a:prstDash val="solid"/>
           </a:ln>
         </p:spPr>
+        <p:txBody>
+          <a:bodyPr/>
+          <a:p/>
+        </p:txBody>
       </p:sp>
       <p:pic>
         <p:nvPicPr>
@@ -3191,6 +3215,10 @@
             </a:outerShdw>
           </a:effectLst>
         </p:spPr>
+        <p:txBody>
+          <a:bodyPr/>
+          <a:p/>
+        </p:txBody>
       </p:sp>
       <p:sp>
         <p:nvSpPr>
@@ -3269,7 +3297,7 @@
                 <a:ea typeface="Calibri" pitchFamily="34" charset="-122"/>
                 <a:cs typeface="Calibri" pitchFamily="34" charset="-120"/>
               </a:rPr>
-              <a:t>~89,3 M filas Silver | &gt; 14,5 GB en disco.</a:t>
+              <a:t>~98,6 M filas Silver | ~16 GB en disco.</a:t>
             </a:r>
             <a:endParaRPr lang="en-US" sz="1000" dirty="0"/>
           </a:p>
@@ -3290,7 +3318,7 @@
                 <a:ea typeface="Calibri" pitchFamily="34" charset="-122"/>
                 <a:cs typeface="Calibri" pitchFamily="34" charset="-120"/>
               </a:rPr>
-              <a:t>14 Particiones por fecha_key + 4 Vistas Mat.</a:t>
+              <a:t>15 Particiones por fecha_key + 4 Vistas Mat.</a:t>
             </a:r>
             <a:endParaRPr lang="en-US" sz="1000" dirty="0"/>
           </a:p>
@@ -3341,6 +3369,10 @@
             <a:prstDash val="solid"/>
           </a:ln>
         </p:spPr>
+        <p:txBody>
+          <a:bodyPr/>
+          <a:p/>
+        </p:txBody>
       </p:sp>
       <p:pic>
         <p:nvPicPr>
@@ -3586,6 +3618,10 @@
             </a:outerShdw>
           </a:effectLst>
         </p:spPr>
+        <p:txBody>
+          <a:bodyPr/>
+          <a:p/>
+        </p:txBody>
       </p:sp>
       <p:sp>
         <p:nvSpPr>
@@ -3643,7 +3679,7 @@
                 <a:ea typeface="Cambria" pitchFamily="34" charset="-122"/>
                 <a:cs typeface="Cambria" pitchFamily="34" charset="-120"/>
               </a:rPr>
-              <a:t>gold.dim_fecha (47.848 filas)</a:t>
+              <a:t>gold.dim_fecha (47.847 filas)</a:t>
             </a:r>
             <a:endParaRPr lang="en-US" sz="1000" dirty="0"/>
           </a:p>
@@ -3713,6 +3749,10 @@
             <a:prstDash val="solid"/>
           </a:ln>
         </p:spPr>
+        <p:txBody>
+          <a:bodyPr/>
+          <a:p/>
+        </p:txBody>
       </p:sp>
       <p:sp>
         <p:nvSpPr>
@@ -3747,6 +3787,10 @@
             </a:outerShdw>
           </a:effectLst>
         </p:spPr>
+        <p:txBody>
+          <a:bodyPr/>
+          <a:p/>
+        </p:txBody>
       </p:sp>
       <p:sp>
         <p:nvSpPr>
@@ -3804,7 +3848,7 @@
                 <a:ea typeface="Cambria" pitchFamily="34" charset="-122"/>
                 <a:cs typeface="Cambria" pitchFamily="34" charset="-120"/>
               </a:rPr>
-              <a:t>gold.dim_artista (3,01 M filas)</a:t>
+              <a:t>gold.dim_artista (3,02 M filas)</a:t>
             </a:r>
             <a:endParaRPr lang="en-US" sz="1000" dirty="0"/>
           </a:p>
@@ -3874,6 +3918,10 @@
             <a:prstDash val="solid"/>
           </a:ln>
         </p:spPr>
+        <p:txBody>
+          <a:bodyPr/>
+          <a:p/>
+        </p:txBody>
       </p:sp>
       <p:sp>
         <p:nvSpPr>
@@ -3908,6 +3956,10 @@
             </a:outerShdw>
           </a:effectLst>
         </p:spPr>
+        <p:txBody>
+          <a:bodyPr/>
+          <a:p/>
+        </p:txBody>
       </p:sp>
       <p:sp>
         <p:nvSpPr>
@@ -3965,7 +4017,7 @@
                 <a:ea typeface="Cambria" pitchFamily="34" charset="-122"/>
                 <a:cs typeface="Cambria" pitchFamily="34" charset="-120"/>
               </a:rPr>
-              <a:t>gold.dim_lanzamiento (~150)</a:t>
+              <a:t>gold.dim_lanzamiento (313)</a:t>
             </a:r>
             <a:endParaRPr lang="en-US" sz="1000" dirty="0"/>
           </a:p>
@@ -4035,6 +4087,10 @@
             <a:prstDash val="solid"/>
           </a:ln>
         </p:spPr>
+        <p:txBody>
+          <a:bodyPr/>
+          <a:p/>
+        </p:txBody>
       </p:sp>
       <p:sp>
         <p:nvSpPr>
@@ -4069,6 +4125,10 @@
             </a:outerShdw>
           </a:effectLst>
         </p:spPr>
+        <p:txBody>
+          <a:bodyPr/>
+          <a:p/>
+        </p:txBody>
       </p:sp>
       <p:sp>
         <p:nvSpPr>
@@ -4126,7 +4186,7 @@
                 <a:ea typeface="Cambria" pitchFamily="34" charset="-122"/>
                 <a:cs typeface="Cambria" pitchFamily="34" charset="-120"/>
               </a:rPr>
-              <a:t>gold.dim_geografia (120.108)</a:t>
+              <a:t>gold.dim_geografia (120.109)</a:t>
             </a:r>
             <a:endParaRPr lang="en-US" sz="1000" dirty="0"/>
           </a:p>
@@ -4196,6 +4256,10 @@
             <a:prstDash val="solid"/>
           </a:ln>
         </p:spPr>
+        <p:txBody>
+          <a:bodyPr/>
+          <a:p/>
+        </p:txBody>
       </p:sp>
       <p:sp>
         <p:nvSpPr>
@@ -4230,6 +4294,10 @@
             </a:outerShdw>
           </a:effectLst>
         </p:spPr>
+        <p:txBody>
+          <a:bodyPr/>
+          <a:p/>
+        </p:txBody>
       </p:sp>
       <p:sp>
         <p:nvSpPr>
@@ -4287,7 +4355,7 @@
                 <a:ea typeface="Cambria" pitchFamily="34" charset="-122"/>
                 <a:cs typeface="Cambria" pitchFamily="34" charset="-120"/>
               </a:rPr>
-              <a:t>gold.dim_formato (114 filas)</a:t>
+              <a:t>gold.dim_formato (115 filas)</a:t>
             </a:r>
             <a:endParaRPr lang="en-US" sz="1000" dirty="0"/>
           </a:p>
@@ -4357,6 +4425,10 @@
             <a:prstDash val="solid"/>
           </a:ln>
         </p:spPr>
+        <p:txBody>
+          <a:bodyPr/>
+          <a:p/>
+        </p:txBody>
       </p:sp>
       <p:sp>
         <p:nvSpPr>
@@ -4391,6 +4463,10 @@
             </a:outerShdw>
           </a:effectLst>
         </p:spPr>
+        <p:txBody>
+          <a:bodyPr/>
+          <a:p/>
+        </p:txBody>
       </p:sp>
       <p:sp>
         <p:nvSpPr>
@@ -4518,6 +4594,10 @@
             <a:prstDash val="solid"/>
           </a:ln>
         </p:spPr>
+        <p:txBody>
+          <a:bodyPr/>
+          <a:p/>
+        </p:txBody>
       </p:sp>
       <p:sp>
         <p:nvSpPr>
@@ -4552,6 +4632,10 @@
             </a:outerShdw>
           </a:effectLst>
         </p:spPr>
+        <p:txBody>
+          <a:bodyPr/>
+          <a:p/>
+        </p:txBody>
       </p:sp>
       <p:sp>
         <p:nvSpPr>
@@ -5264,6 +5348,10 @@
             </a:outerShdw>
           </a:effectLst>
         </p:spPr>
+        <p:txBody>
+          <a:bodyPr/>
+          <a:p/>
+        </p:txBody>
       </p:sp>
       <p:sp>
         <p:nvSpPr>
@@ -5301,7 +5389,7 @@
                 <a:ea typeface="Calibri" pitchFamily="34" charset="-122"/>
                 <a:cs typeface="Calibri" pitchFamily="34" charset="-120"/>
               </a:rPr>
-              <a:t>1. gold.dim_fecha (47.848 filas)</a:t>
+              <a:t>1. gold.dim_fecha (47.847 filas)</a:t>
             </a:r>
             <a:endParaRPr lang="en-US" sz="1200" dirty="0"/>
           </a:p>
@@ -5403,6 +5491,10 @@
             </a:outerShdw>
           </a:effectLst>
         </p:spPr>
+        <p:txBody>
+          <a:bodyPr/>
+          <a:p/>
+        </p:txBody>
       </p:sp>
       <p:sp>
         <p:nvSpPr>
@@ -5440,7 +5532,7 @@
                 <a:ea typeface="Calibri" pitchFamily="34" charset="-122"/>
                 <a:cs typeface="Calibri" pitchFamily="34" charset="-120"/>
               </a:rPr>
-              <a:t>2. gold.dim_artista (3.010.452 filas)</a:t>
+              <a:t>2. gold.dim_artista (3.015.713 filas)</a:t>
             </a:r>
             <a:endParaRPr lang="en-US" sz="1200" dirty="0"/>
           </a:p>
@@ -5542,6 +5634,10 @@
             </a:outerShdw>
           </a:effectLst>
         </p:spPr>
+        <p:txBody>
+          <a:bodyPr/>
+          <a:p/>
+        </p:txBody>
       </p:sp>
       <p:sp>
         <p:nvSpPr>
@@ -5579,7 +5675,7 @@
                 <a:ea typeface="Calibri" pitchFamily="34" charset="-122"/>
                 <a:cs typeface="Calibri" pitchFamily="34" charset="-120"/>
               </a:rPr>
-              <a:t>3. gold.dim_lanzamiento (~150 perfiles)</a:t>
+              <a:t>3. gold.dim_lanzamiento (313 perfiles)</a:t>
             </a:r>
             <a:endParaRPr lang="en-US" sz="1200" dirty="0"/>
           </a:p>
@@ -5681,6 +5777,10 @@
             </a:outerShdw>
           </a:effectLst>
         </p:spPr>
+        <p:txBody>
+          <a:bodyPr/>
+          <a:p/>
+        </p:txBody>
       </p:sp>
       <p:sp>
         <p:nvSpPr>
@@ -5718,7 +5818,7 @@
                 <a:ea typeface="Calibri" pitchFamily="34" charset="-122"/>
                 <a:cs typeface="Calibri" pitchFamily="34" charset="-120"/>
               </a:rPr>
-              <a:t>4. gold.dim_geografia (120.108 filas)</a:t>
+              <a:t>4. gold.dim_geografia (120.109 filas)</a:t>
             </a:r>
             <a:endParaRPr lang="en-US" sz="1200" dirty="0"/>
           </a:p>
@@ -5820,6 +5920,10 @@
             </a:outerShdw>
           </a:effectLst>
         </p:spPr>
+        <p:txBody>
+          <a:bodyPr/>
+          <a:p/>
+        </p:txBody>
       </p:sp>
       <p:sp>
         <p:nvSpPr>
@@ -5857,7 +5961,7 @@
                 <a:ea typeface="Calibri" pitchFamily="34" charset="-122"/>
                 <a:cs typeface="Calibri" pitchFamily="34" charset="-120"/>
               </a:rPr>
-              <a:t>5. gold.dim_formato (114 filas)</a:t>
+              <a:t>5. gold.dim_formato (115 filas)</a:t>
             </a:r>
             <a:endParaRPr lang="en-US" sz="1200" dirty="0"/>
           </a:p>
@@ -5959,6 +6063,10 @@
             </a:outerShdw>
           </a:effectLst>
         </p:spPr>
+        <p:txBody>
+          <a:bodyPr/>
+          <a:p/>
+        </p:txBody>
       </p:sp>
       <p:sp>
         <p:nvSpPr>
@@ -6038,7 +6146,7 @@
                 <a:ea typeface="Calibri" pitchFamily="34" charset="-122"/>
                 <a:cs typeface="Calibri" pitchFamily="34" charset="-120"/>
               </a:rPr>
-              <a:t>Atributos: nombre_idioma ('Inglés', 'Español', 'Japonés', 'Alemán', 'Francés', 'Sin Contenido Lingüístico / Instrumental', 'Múltiples Idiomas'), codigo_iso ('eng', 'spa', 'jpn', 'zxx', 'mul', 'und').</a:t>
+              <a:t>Atributos: nombre_idioma (nombre oficial del catálogo silver.language: 'English', 'Spanish', 'Japanese', 'German', 'French', '[No linguistic content]', '[Multiple languages]'; clave 0 = 'Idioma No Especificado'), codigo_iso ISO 639-3 ('eng', 'spa', 'jpn', 'zxx', 'mul', 'und').</a:t>
             </a:r>
             <a:endParaRPr lang="en-US" sz="1200" dirty="0"/>
           </a:p>
@@ -6059,7 +6167,7 @@
                 <a:ea typeface="Calibri" pitchFamily="34" charset="-122"/>
                 <a:cs typeface="Calibri" pitchFamily="34" charset="-120"/>
               </a:rPr>
-              <a:t>Rol: Clasificación lingüística oficial ISO 639-3 de los lanzamientos.</a:t>
+              <a:t>Rol: Clasificación lingüística ISO 639-3, resuelta con JOIN al catálogo oficial silver.language (7.846 idiomas).</a:t>
             </a:r>
             <a:endParaRPr lang="en-US" sz="1200" dirty="0"/>
           </a:p>
@@ -6285,6 +6393,10 @@
             </a:outerShdw>
           </a:effectLst>
         </p:spPr>
+        <p:txBody>
+          <a:bodyPr/>
+          <a:p/>
+        </p:txBody>
       </p:sp>
       <p:sp>
         <p:nvSpPr>
@@ -8644,6 +8756,10 @@
             </a:outerShdw>
           </a:effectLst>
         </p:spPr>
+        <p:txBody>
+          <a:bodyPr/>
+          <a:p/>
+        </p:txBody>
       </p:sp>
       <p:sp>
         <p:nvSpPr>
@@ -8743,7 +8859,7 @@
                 <a:ea typeface="Calibri" pitchFamily="34" charset="-122"/>
                 <a:cs typeface="Calibri" pitchFamily="34" charset="-120"/>
               </a:rPr>
-              <a:t>Ejecuta en orden los 5 archivos DDL:</a:t>
+              <a:t>Ejecuta en orden los 6 archivos DDL:</a:t>
             </a:r>
             <a:endParaRPr lang="en-US" sz="1200" dirty="0"/>
           </a:p>
@@ -8787,7 +8903,7 @@
                 <a:ea typeface="Calibri" pitchFamily="34" charset="-122"/>
                 <a:cs typeface="Calibri" pitchFamily="34" charset="-120"/>
               </a:rPr>
-              <a:t>02_create_silver_tables.sql (10 tablas)</a:t>
+              <a:t>02_create_silver_tables.sql (11 tablas)</a:t>
             </a:r>
             <a:endParaRPr lang="en-US" sz="1200" dirty="0"/>
           </a:p>
@@ -8831,7 +8947,7 @@
                 <a:ea typeface="Calibri" pitchFamily="34" charset="-122"/>
                 <a:cs typeface="Calibri" pitchFamily="34" charset="-120"/>
               </a:rPr>
-              <a:t>04_indexes_partitions.sql (14 particiones)</a:t>
+              <a:t>04_indexes_partitions.sql (15 particiones)</a:t>
             </a:r>
             <a:endParaRPr lang="en-US" sz="1200" dirty="0"/>
           </a:p>
@@ -8853,7 +8969,7 @@
                 <a:ea typeface="Calibri" pitchFamily="34" charset="-122"/>
                 <a:cs typeface="Calibri" pitchFamily="34" charset="-120"/>
               </a:rPr>
-              <a:t>05_aggregations.sql (4 Vistas Mat.)</a:t>
+              <a:t>05/06: vistas mat. y distribución</a:t>
             </a:r>
             <a:endParaRPr lang="en-US" sz="1200" dirty="0"/>
           </a:p>
@@ -8883,6 +8999,10 @@
             <a:prstDash val="solid"/>
           </a:ln>
         </p:spPr>
+        <p:txBody>
+          <a:bodyPr/>
+          <a:p/>
+        </p:txBody>
       </p:sp>
       <p:pic>
         <p:nvPicPr>
@@ -8932,6 +9052,10 @@
             <a:prstDash val="solid"/>
           </a:ln>
         </p:spPr>
+        <p:txBody>
+          <a:bodyPr/>
+          <a:p/>
+        </p:txBody>
       </p:sp>
       <p:sp>
         <p:nvSpPr>
@@ -8966,6 +9090,10 @@
             </a:outerShdw>
           </a:effectLst>
         </p:spPr>
+        <p:txBody>
+          <a:bodyPr/>
+          <a:p/>
+        </p:txBody>
       </p:sp>
       <p:sp>
         <p:nvSpPr>
@@ -9137,6 +9265,10 @@
             <a:prstDash val="solid"/>
           </a:ln>
         </p:spPr>
+        <p:txBody>
+          <a:bodyPr/>
+          <a:p/>
+        </p:txBody>
       </p:sp>
       <p:pic>
         <p:nvPicPr>
@@ -9186,6 +9318,10 @@
             <a:prstDash val="solid"/>
           </a:ln>
         </p:spPr>
+        <p:txBody>
+          <a:bodyPr/>
+          <a:p/>
+        </p:txBody>
       </p:sp>
       <p:sp>
         <p:nvSpPr>
@@ -9220,6 +9356,10 @@
             </a:outerShdw>
           </a:effectLst>
         </p:spPr>
+        <p:txBody>
+          <a:bodyPr/>
+          <a:p/>
+        </p:txBody>
       </p:sp>
       <p:sp>
         <p:nvSpPr>
@@ -9370,6 +9510,10 @@
             <a:prstDash val="solid"/>
           </a:ln>
         </p:spPr>
+        <p:txBody>
+          <a:bodyPr/>
+          <a:p/>
+        </p:txBody>
       </p:sp>
       <p:pic>
         <p:nvPicPr>
@@ -9419,6 +9563,10 @@
             <a:prstDash val="solid"/>
           </a:ln>
         </p:spPr>
+        <p:txBody>
+          <a:bodyPr/>
+          <a:p/>
+        </p:txBody>
       </p:sp>
       <p:sp>
         <p:nvSpPr>
@@ -9453,6 +9601,10 @@
             </a:outerShdw>
           </a:effectLst>
         </p:spPr>
+        <p:txBody>
+          <a:bodyPr/>
+          <a:p/>
+        </p:txBody>
       </p:sp>
       <p:sp>
         <p:nvSpPr>
@@ -9531,7 +9683,7 @@
                 <a:ea typeface="Calibri" pitchFamily="34" charset="-122"/>
                 <a:cs typeface="Calibri" pitchFamily="34" charset="-120"/>
               </a:rPr>
-              <a:t>Puebla en orden las 6 dimensiones conformadas en español (populate_dim_*.sql).</a:t>
+              <a:t>Puebla las 7 dimensiones (populate_dim_*.sql).</a:t>
             </a:r>
             <a:endParaRPr lang="en-US" sz="1200" dirty="0"/>
           </a:p>
@@ -9552,7 +9704,7 @@
                 <a:ea typeface="Calibri" pitchFamily="34" charset="-122"/>
                 <a:cs typeface="Calibri" pitchFamily="34" charset="-120"/>
               </a:rPr>
-              <a:t>Ejecuta populate_fact_tracks.sql: resuelve fechas reales, artista principal y hace GROUP BY diario con las 11 métricas aditivas.</a:t>
+              <a:t>populate_fact_tracks.sql agrega por día 11 métricas aditivas; cada lanzamiento cuenta una sola vez.</a:t>
             </a:r>
             <a:endParaRPr lang="en-US" sz="1200" dirty="0"/>
           </a:p>
@@ -9573,7 +9725,7 @@
                 <a:ea typeface="Calibri" pitchFamily="34" charset="-122"/>
                 <a:cs typeface="Calibri" pitchFamily="34" charset="-120"/>
               </a:rPr>
-              <a:t>Refresca las 4 MVs y valida calidad en meta.data_quality_log.</a:t>
+              <a:t>Puebla el hecho de distribución, refresca las MVs y concilia contra Silver.</a:t>
             </a:r>
             <a:endParaRPr lang="en-US" sz="1200" dirty="0"/>
           </a:p>
@@ -9603,6 +9755,10 @@
             <a:prstDash val="solid"/>
           </a:ln>
         </p:spPr>
+        <p:txBody>
+          <a:bodyPr/>
+          <a:p/>
+        </p:txBody>
       </p:sp>
       <p:pic>
         <p:nvPicPr>
@@ -10545,7 +10701,7 @@
                           <a:ea typeface="Consolas" pitchFamily="34" charset="-122"/>
                           <a:cs typeface="Consolas" pitchFamily="34" charset="-120"/>
                         </a:rPr>
-                        <a:t>Prioridad: release_country → release_unknown_country → artist.begin_date_year → 0.</a:t>
+                        <a:t>Prioridad: release_country → release_unknown_country → 0 (Sin Fecha). No se imputa con el año del artista.</a:t>
                       </a:r>
                       <a:endParaRPr lang="en-US" sz="1050" dirty="0">
                         <a:latin typeface="Consolas" charset="0"/>
@@ -12737,7 +12893,7 @@
                           <a:ea typeface="Consolas" pitchFamily="34" charset="-122"/>
                           <a:cs typeface="Consolas" pitchFamily="34" charset="-120"/>
                         </a:rPr>
-                        <a:t>Ejecución de 7 reglas críticas al cierre de run_gold_pipeline.py.</a:t>
+                        <a:t>Ejecución de 10 reglas críticas al cierre de run_gold_pipeline.py.</a:t>
                       </a:r>
                       <a:endParaRPr lang="en-US" sz="1050" dirty="0">
                         <a:latin typeface="Consolas" charset="0"/>
@@ -13081,6 +13237,10 @@
             </a:outerShdw>
           </a:effectLst>
         </p:spPr>
+        <p:txBody>
+          <a:bodyPr/>
+          <a:p/>
+        </p:txBody>
       </p:sp>
       <p:sp>
         <p:nvSpPr>
@@ -13138,7 +13298,7 @@
                 <a:ea typeface="Cambria" pitchFamily="34" charset="-122"/>
                 <a:cs typeface="Cambria" pitchFamily="34" charset="-120"/>
               </a:rPr>
-              <a:t>14 Particiones por fecha_key</a:t>
+              <a:t>15 Particiones por fecha_key</a:t>
             </a:r>
             <a:endParaRPr lang="en-US" sz="1000" dirty="0"/>
           </a:p>
@@ -13324,6 +13484,10 @@
             </a:outerShdw>
           </a:effectLst>
         </p:spPr>
+        <p:txBody>
+          <a:bodyPr/>
+          <a:p/>
+        </p:txBody>
       </p:sp>
       <p:sp>
         <p:nvSpPr>
@@ -13525,6 +13689,10 @@
             </a:outerShdw>
           </a:effectLst>
         </p:spPr>
+        <p:txBody>
+          <a:bodyPr/>
+          <a:p/>
+        </p:txBody>
       </p:sp>
       <p:sp>
         <p:nvSpPr>
@@ -13767,7 +13935,7 @@
                 <a:ea typeface="Calibri" pitchFamily="34" charset="-122"/>
                 <a:cs typeface="Calibri" pitchFamily="34" charset="-120"/>
               </a:rPr>
-              <a:t>Demuestra el acortamiento musical en la era del streaming y la transición Vinilo → CD → Digital.</a:t>
+              <a:t>Evidencia la transición Vinilo → CD → Digital (el digital supera al CD en 2012) y una duración que crece a largo plazo (r = 0,89) y se acorta desde 2013 (r = -0,57).</a:t>
             </a:r>
             <a:endParaRPr lang="en-US" sz="1000" dirty="0"/>
           </a:p>
@@ -13993,6 +14161,10 @@
             </a:outerShdw>
           </a:effectLst>
         </p:spPr>
+        <p:txBody>
+          <a:bodyPr/>
+          <a:p/>
+        </p:txBody>
       </p:sp>
       <p:sp>
         <p:nvSpPr>
@@ -14132,6 +14304,10 @@
             </a:outerShdw>
           </a:effectLst>
         </p:spPr>
+        <p:txBody>
+          <a:bodyPr/>
+          <a:p/>
+        </p:txBody>
       </p:sp>
       <p:sp>
         <p:nvSpPr>
@@ -14211,7 +14387,7 @@
                 <a:ea typeface="Calibri" pitchFamily="34" charset="-122"/>
                 <a:cs typeface="Calibri" pitchFamily="34" charset="-120"/>
               </a:rPr>
-              <a:t>Se procesaron ~89,3 millones de registros en Silver y se superaron los 14,5 GB en disco, cumpliendo con creces los requisitos no funcionales de estrés.</a:t>
+              <a:t>Se procesaron ~98,6 millones de registros en Silver y se alcanzaron 16 GB en disco, cumpliendo con creces los requisitos no funcionales de estrés.</a:t>
             </a:r>
             <a:endParaRPr lang="en-US" sz="1500" dirty="0"/>
           </a:p>
@@ -14250,6 +14426,10 @@
             </a:outerShdw>
           </a:effectLst>
         </p:spPr>
+        <p:txBody>
+          <a:bodyPr/>
+          <a:p/>
+        </p:txBody>
       </p:sp>
       <p:sp>
         <p:nvSpPr>
@@ -14329,7 +14509,7 @@
                 <a:ea typeface="Calibri" pitchFamily="34" charset="-122"/>
                 <a:cs typeface="Calibri" pitchFamily="34" charset="-120"/>
               </a:rPr>
-              <a:t>La auditoría automatizada en meta.etl_audit y meta.data_quality_log asegura trazabilidad de grado empresarial.</a:t>
+              <a:t>La auditoría automatizada en meta.etl_audit y meta.data_quality_log asegura trazabilidad. Una auditoría posterior detectó y corrigió conteos no aditivos, fechas imputadas con el año del artista y un mapeo de idiomas erróneo.</a:t>
             </a:r>
             <a:endParaRPr lang="en-US" sz="1500" dirty="0"/>
           </a:p>
@@ -14368,6 +14548,10 @@
             </a:outerShdw>
           </a:effectLst>
         </p:spPr>
+        <p:txBody>
+          <a:bodyPr/>
+          <a:p/>
+        </p:txBody>
       </p:sp>
       <p:sp>
         <p:nvSpPr>
@@ -14426,7 +14610,7 @@
                 <a:ea typeface="Calibri" pitchFamily="34" charset="-122"/>
                 <a:cs typeface="Calibri" pitchFamily="34" charset="-120"/>
               </a:rPr>
-              <a:t>La combinación de particionamiento declarativo por rango en fecha_key (14 particiones) y 4 vistas materializadas permite responder en milisegundos a los requerimientos RF01–RF08.</a:t>
+              <a:t>La combinación de particionamiento declarativo por rango en fecha_key (15 particiones) y 4 vistas materializadas permite responder en milisegundos a los requerimientos RF01–RF08.</a:t>
             </a:r>
             <a:endParaRPr lang="en-US" sz="1500" dirty="0"/>
           </a:p>
@@ -14447,7 +14631,7 @@
                 <a:ea typeface="Calibri" pitchFamily="34" charset="-122"/>
                 <a:cs typeface="Calibri" pitchFamily="34" charset="-120"/>
               </a:rPr>
-              <a:t>En Power BI se comprueban con evidencia empírica la reducción de la duración musical en la era del streaming, la sustitución tecnológica de formatos físicos por digitales y las brechas regionales de formalización ISRC.</a:t>
+              <a:t>En Power BI (3 páginas, 26 medidas DAX) se evidencian la sustitución de formatos físicos por digitales (cruce en 2012), una duración que crece a largo plazo y se acorta levemente desde 2013, y las brechas regionales de formalización ISRC.</a:t>
             </a:r>
             <a:endParaRPr lang="en-US" sz="1500" dirty="0"/>
           </a:p>
@@ -14673,6 +14857,10 @@
             </a:outerShdw>
           </a:effectLst>
         </p:spPr>
+        <p:txBody>
+          <a:bodyPr/>
+          <a:p/>
+        </p:txBody>
       </p:sp>
       <p:sp>
         <p:nvSpPr>
@@ -14814,7 +15002,7 @@
                 <a:ea typeface="Calibri" pitchFamily="34" charset="-122"/>
                 <a:cs typeface="Calibri" pitchFamily="34" charset="-120"/>
               </a:rPr>
-              <a:t>area (120k), artist (3.01M), artist_credit_name (6.21M).</a:t>
+              <a:t>area (120k), artist (3.02M), artist_credit_name (7.30M).</a:t>
             </a:r>
             <a:endParaRPr lang="en-US" sz="1000" dirty="0"/>
           </a:p>
@@ -14835,7 +15023,7 @@
                 <a:ea typeface="Calibri" pitchFamily="34" charset="-122"/>
                 <a:cs typeface="Calibri" pitchFamily="34" charset="-120"/>
               </a:rPr>
-              <a:t>release (5.84M), release_country (5.48M), release_unknown_country (215k).</a:t>
+              <a:t>release (5.86M), release_country (13.34M), release_unknown_country (484k).</a:t>
             </a:r>
             <a:endParaRPr lang="en-US" sz="1000" dirty="0"/>
           </a:p>
@@ -14856,7 +15044,7 @@
                 <a:ea typeface="Calibri" pitchFamily="34" charset="-122"/>
                 <a:cs typeface="Calibri" pitchFamily="34" charset="-120"/>
               </a:rPr>
-              <a:t>medium (6.41M), recording (40.53M), track (15M), isrc (6.48M).</a:t>
+              <a:t>medium (6.43M), recording (40.60M), track (15M), isrc (6.50M).</a:t>
             </a:r>
             <a:endParaRPr lang="en-US" sz="1000" dirty="0"/>
           </a:p>
@@ -14877,7 +15065,7 @@
                 <a:ea typeface="Calibri" pitchFamily="34" charset="-122"/>
                 <a:cs typeface="Calibri" pitchFamily="34" charset="-120"/>
               </a:rPr>
-              <a:t>Total procesado en origen: ~89,3 millones de registros.</a:t>
+              <a:t>Total procesado en origen: ~98,6 millones de registros.</a:t>
             </a:r>
             <a:endParaRPr lang="en-US" sz="1000" dirty="0"/>
           </a:p>
@@ -14916,6 +15104,10 @@
             </a:outerShdw>
           </a:effectLst>
         </p:spPr>
+        <p:txBody>
+          <a:bodyPr/>
+          <a:p/>
+        </p:txBody>
       </p:sp>
       <p:sp>
         <p:nvSpPr>
@@ -15036,7 +15228,7 @@
                 <a:ea typeface="Calibri" pitchFamily="34" charset="-122"/>
                 <a:cs typeface="Calibri" pitchFamily="34" charset="-120"/>
               </a:rPr>
-              <a:t>Penalización severa de I/O y RAM: calcular tendencias por década o cobertura ISRC sobre 40,5M de grabaciones y 15M de pistas en 3NF agota la memoria y tarda minutos.</a:t>
+              <a:t>Penalización severa de I/O y RAM: calcular tendencias por década o cobertura ISRC sobre 40,6M de grabaciones y 15M de pistas en 3NF agota la memoria y tarda minutos.</a:t>
             </a:r>
             <a:endParaRPr lang="en-US" sz="1000" dirty="0"/>
           </a:p>
@@ -15096,6 +15288,10 @@
             </a:outerShdw>
           </a:effectLst>
         </p:spPr>
+        <p:txBody>
+          <a:bodyPr/>
+          <a:p/>
+        </p:txBody>
       </p:sp>
       <p:sp>
         <p:nvSpPr>
@@ -15237,7 +15433,7 @@
                 <a:ea typeface="Calibri" pitchFamily="34" charset="-122"/>
                 <a:cs typeface="Calibri" pitchFamily="34" charset="-120"/>
               </a:rPr>
-              <a:t>Particionamiento por rango en fecha_key (14 particiones) + 4 Vistas Materializadas: consultas en &lt; 0,10 s.</a:t>
+              <a:t>Particionamiento por rango en fecha_key (15 particiones) + 4 Vistas Materializadas: consultas en &lt; 0,10 s.</a:t>
             </a:r>
             <a:endParaRPr lang="en-US" sz="1000" dirty="0"/>
           </a:p>
@@ -15463,6 +15659,10 @@
             </a:outerShdw>
           </a:effectLst>
         </p:spPr>
+        <p:txBody>
+          <a:bodyPr/>
+          <a:p/>
+        </p:txBody>
       </p:sp>
       <p:sp>
         <p:nvSpPr>
@@ -15559,6 +15759,10 @@
             </a:outerShdw>
           </a:effectLst>
         </p:spPr>
+        <p:txBody>
+          <a:bodyPr/>
+          <a:p/>
+        </p:txBody>
       </p:sp>
       <p:sp>
         <p:nvSpPr>
@@ -15655,6 +15859,10 @@
             </a:outerShdw>
           </a:effectLst>
         </p:spPr>
+        <p:txBody>
+          <a:bodyPr/>
+          <a:p/>
+        </p:txBody>
       </p:sp>
       <p:sp>
         <p:nvSpPr>
@@ -15751,6 +15959,10 @@
             </a:outerShdw>
           </a:effectLst>
         </p:spPr>
+        <p:txBody>
+          <a:bodyPr/>
+          <a:p/>
+        </p:txBody>
       </p:sp>
       <p:sp>
         <p:nvSpPr>
@@ -15847,6 +16059,10 @@
             </a:outerShdw>
           </a:effectLst>
         </p:spPr>
+        <p:txBody>
+          <a:bodyPr/>
+          <a:p/>
+        </p:txBody>
       </p:sp>
       <p:sp>
         <p:nvSpPr>
@@ -15943,6 +16159,10 @@
             </a:outerShdw>
           </a:effectLst>
         </p:spPr>
+        <p:txBody>
+          <a:bodyPr/>
+          <a:p/>
+        </p:txBody>
       </p:sp>
       <p:sp>
         <p:nvSpPr>
@@ -16039,6 +16259,10 @@
             </a:outerShdw>
           </a:effectLst>
         </p:spPr>
+        <p:txBody>
+          <a:bodyPr/>
+          <a:p/>
+        </p:txBody>
       </p:sp>
       <p:sp>
         <p:nvSpPr>
@@ -16322,6 +16546,10 @@
             </a:outerShdw>
           </a:effectLst>
         </p:spPr>
+        <p:txBody>
+          <a:bodyPr/>
+          <a:p/>
+        </p:txBody>
       </p:sp>
       <p:sp>
         <p:nvSpPr>
@@ -16418,6 +16646,10 @@
             </a:outerShdw>
           </a:effectLst>
         </p:spPr>
+        <p:txBody>
+          <a:bodyPr/>
+          <a:p/>
+        </p:txBody>
       </p:sp>
       <p:sp>
         <p:nvSpPr>
@@ -16514,6 +16746,10 @@
             </a:outerShdw>
           </a:effectLst>
         </p:spPr>
+        <p:txBody>
+          <a:bodyPr/>
+          <a:p/>
+        </p:txBody>
       </p:sp>
       <p:sp>
         <p:nvSpPr>
@@ -16610,6 +16846,10 @@
             </a:outerShdw>
           </a:effectLst>
         </p:spPr>
+        <p:txBody>
+          <a:bodyPr/>
+          <a:p/>
+        </p:txBody>
       </p:sp>
       <p:sp>
         <p:nvSpPr>
@@ -16706,6 +16946,10 @@
             </a:outerShdw>
           </a:effectLst>
         </p:spPr>
+        <p:txBody>
+          <a:bodyPr/>
+          <a:p/>
+        </p:txBody>
       </p:sp>
       <p:sp>
         <p:nvSpPr>
@@ -16802,6 +17046,10 @@
             </a:outerShdw>
           </a:effectLst>
         </p:spPr>
+        <p:txBody>
+          <a:bodyPr/>
+          <a:p/>
+        </p:txBody>
       </p:sp>
       <p:sp>
         <p:nvSpPr>
@@ -16898,6 +17146,10 @@
             </a:outerShdw>
           </a:effectLst>
         </p:spPr>
+        <p:txBody>
+          <a:bodyPr/>
+          <a:p/>
+        </p:txBody>
       </p:sp>
       <p:sp>
         <p:nvSpPr>
@@ -16994,6 +17246,10 @@
             </a:outerShdw>
           </a:effectLst>
         </p:spPr>
+        <p:txBody>
+          <a:bodyPr/>
+          <a:p/>
+        </p:txBody>
       </p:sp>
       <p:sp>
         <p:nvSpPr>
@@ -18179,7 +18435,7 @@
                           <a:ea typeface="Calibri" pitchFamily="34" charset="-122"/>
                           <a:cs typeface="Calibri" pitchFamily="34" charset="-120"/>
                         </a:rPr>
-                        <a:t>&gt; 14,5 GB consolidados en disco entre capas Silver, Gold y Meta.</a:t>
+                        <a:t>~16 GB consolidados en disco entre capas Silver, Gold y Meta.</a:t>
                       </a:r>
                       <a:endParaRPr lang="en-US" sz="1150" dirty="0">
                         <a:latin typeface="Calibri" charset="0"/>
@@ -18521,7 +18777,7 @@
                           <a:ea typeface="Calibri" pitchFamily="34" charset="-122"/>
                           <a:cs typeface="Calibri" pitchFamily="34" charset="-120"/>
                         </a:rPr>
-                        <a:t>~89,3 M de filas en Silver (10 tablas) y 15 M de pistas agregadas en Gold.</a:t>
+                        <a:t>~98,6 M de filas en Silver (10 tablas) y 15 M de pistas agregadas en Gold.</a:t>
                       </a:r>
                       <a:endParaRPr lang="en-US" sz="1150" dirty="0">
                         <a:latin typeface="Calibri" charset="0"/>
@@ -20917,6 +21173,10 @@
             </a:outerShdw>
           </a:effectLst>
         </p:spPr>
+        <p:txBody>
+          <a:bodyPr/>
+          <a:p/>
+        </p:txBody>
       </p:sp>
       <p:sp>
         <p:nvSpPr>
@@ -21037,7 +21297,7 @@
                 <a:ea typeface="Calibri" pitchFamily="34" charset="-122"/>
                 <a:cs typeface="Calibri" pitchFamily="34" charset="-120"/>
               </a:rPr>
-              <a:t>10 archivos TSV planos sin encabezados y con nulos representados como \N.</a:t>
+              <a:t>11 archivos TSV planos (incluye el catálogo language) sin encabezados y con nulos representados como \N.</a:t>
             </a:r>
             <a:endParaRPr lang="en-US" sz="1000" dirty="0"/>
           </a:p>
@@ -21088,6 +21348,10 @@
             <a:prstDash val="solid"/>
           </a:ln>
         </p:spPr>
+        <p:txBody>
+          <a:bodyPr/>
+          <a:p/>
+        </p:txBody>
       </p:sp>
       <p:pic>
         <p:nvPicPr>
@@ -21137,6 +21401,10 @@
             <a:prstDash val="solid"/>
           </a:ln>
         </p:spPr>
+        <p:txBody>
+          <a:bodyPr/>
+          <a:p/>
+        </p:txBody>
       </p:sp>
       <p:sp>
         <p:nvSpPr>
@@ -21171,6 +21439,10 @@
             </a:outerShdw>
           </a:effectLst>
         </p:spPr>
+        <p:txBody>
+          <a:bodyPr/>
+          <a:p/>
+        </p:txBody>
       </p:sp>
       <p:sp>
         <p:nvSpPr>
@@ -21249,7 +21521,7 @@
                 <a:ea typeface="Calibri" pitchFamily="34" charset="-122"/>
                 <a:cs typeface="Calibri" pitchFamily="34" charset="-120"/>
               </a:rPr>
-              <a:t>10 tablas normalizadas en 3NF (~89,3 M de filas).</a:t>
+              <a:t>10 tablas normalizadas en 3NF (~98,6 M de filas).</a:t>
             </a:r>
             <a:endParaRPr lang="en-US" sz="1000" dirty="0"/>
           </a:p>
@@ -21342,6 +21614,10 @@
             <a:prstDash val="solid"/>
           </a:ln>
         </p:spPr>
+        <p:txBody>
+          <a:bodyPr/>
+          <a:p/>
+        </p:txBody>
       </p:sp>
       <p:pic>
         <p:nvPicPr>
@@ -21391,6 +21667,10 @@
             <a:prstDash val="solid"/>
           </a:ln>
         </p:spPr>
+        <p:txBody>
+          <a:bodyPr/>
+          <a:p/>
+        </p:txBody>
       </p:sp>
       <p:sp>
         <p:nvSpPr>
@@ -21425,6 +21705,10 @@
             </a:outerShdw>
           </a:effectLst>
         </p:spPr>
+        <p:txBody>
+          <a:bodyPr/>
+          <a:p/>
+        </p:txBody>
       </p:sp>
       <p:sp>
         <p:nvSpPr>
@@ -21596,6 +21880,10 @@
             <a:prstDash val="solid"/>
           </a:ln>
         </p:spPr>
+        <p:txBody>
+          <a:bodyPr/>
+          <a:p/>
+        </p:txBody>
       </p:sp>
       <p:pic>
         <p:nvPicPr>
@@ -21645,6 +21933,10 @@
             <a:prstDash val="solid"/>
           </a:ln>
         </p:spPr>
+        <p:txBody>
+          <a:bodyPr/>
+          <a:p/>
+        </p:txBody>
       </p:sp>
       <p:sp>
         <p:nvSpPr>
@@ -21679,6 +21971,10 @@
             </a:outerShdw>
           </a:effectLst>
         </p:spPr>
+        <p:txBody>
+          <a:bodyPr/>
+          <a:p/>
+        </p:txBody>
       </p:sp>
       <p:sp>
         <p:nvSpPr>
@@ -21757,7 +22053,7 @@
                 <a:ea typeface="Calibri" pitchFamily="34" charset="-122"/>
                 <a:cs typeface="Calibri" pitchFamily="34" charset="-120"/>
               </a:rPr>
-              <a:t>Conexión a localhost:5435 (esquema gold).</a:t>
+              <a:t>Conexión a PostgreSQL (esquema gold) en modo Import.</a:t>
             </a:r>
             <a:endParaRPr lang="en-US" sz="1000" dirty="0"/>
           </a:p>
@@ -21850,6 +22146,10 @@
             <a:prstDash val="solid"/>
           </a:ln>
         </p:spPr>
+        <p:txBody>
+          <a:bodyPr/>
+          <a:p/>
+        </p:txBody>
       </p:sp>
       <p:pic>
         <p:nvPicPr>
@@ -21908,6 +22208,10 @@
             </a:outerShdw>
           </a:effectLst>
         </p:spPr>
+        <p:txBody>
+          <a:bodyPr/>
+          <a:p/>
+        </p:txBody>
       </p:sp>
       <p:sp>
         <p:nvSpPr>
@@ -22763,7 +23067,7 @@
                           <a:ea typeface="Calibri" pitchFamily="34" charset="-122"/>
                           <a:cs typeface="Calibri" pitchFamily="34" charset="-120"/>
                         </a:rPr>
-                        <a:t>Automatizar las 7 pruebas de calidad en meta.data_quality_log.</a:t>
+                        <a:t>Automatizar las 10 pruebas de calidad en meta.data_quality_log.</a:t>
                       </a:r>
                       <a:endParaRPr lang="en-US" sz="1000" dirty="0">
                         <a:latin typeface="Calibri" charset="0"/>
@@ -22860,7 +23164,7 @@
                           <a:ea typeface="Calibri" pitchFamily="34" charset="-122"/>
                           <a:cs typeface="Calibri" pitchFamily="34" charset="-120"/>
                         </a:rPr>
-                        <a:t>Auditar la huella física en disco (&gt; 14,5 GB) y tiempos de ejecución con scripts/verify_dwh.py.</a:t>
+                        <a:t>Auditar la huella física en disco (~16 GB) y tiempos de ejecución con scripts/verify_dwh.py.</a:t>
                       </a:r>
                       <a:endParaRPr lang="en-US" sz="1000" dirty="0">
                         <a:latin typeface="Calibri" charset="0"/>
@@ -23242,7 +23546,7 @@
                           <a:ea typeface="Calibri" pitchFamily="34" charset="-122"/>
                           <a:cs typeface="Calibri" pitchFamily="34" charset="-120"/>
                         </a:rPr>
-                        <a:t>Diseñar las 14 particiones físicas por rango en fecha_key (04_indexes_partitions.sql) y los índices B-Tree.</a:t>
+                        <a:t>Diseñar las 15 particiones físicas por rango en fecha_key (04_indexes_partitions.sql) y los índices B-Tree.</a:t>
                       </a:r>
                       <a:endParaRPr lang="en-US" sz="1000" dirty="0">
                         <a:latin typeface="Calibri" charset="0"/>
@@ -23925,6 +24229,10 @@
             </a:outerShdw>
           </a:effectLst>
         </p:spPr>
+        <p:txBody>
+          <a:bodyPr/>
+          <a:p/>
+        </p:txBody>
       </p:sp>
       <p:sp>
         <p:nvSpPr>
@@ -24057,6 +24365,10 @@
             <a:prstDash val="solid"/>
           </a:ln>
         </p:spPr>
+        <p:txBody>
+          <a:bodyPr/>
+          <a:p/>
+        </p:txBody>
       </p:sp>
       <p:pic>
         <p:nvPicPr>
@@ -24115,6 +24427,10 @@
             </a:outerShdw>
           </a:effectLst>
         </p:spPr>
+        <p:txBody>
+          <a:bodyPr/>
+          <a:p/>
+        </p:txBody>
       </p:sp>
       <p:sp>
         <p:nvSpPr>
@@ -24247,6 +24563,10 @@
             <a:prstDash val="solid"/>
           </a:ln>
         </p:spPr>
+        <p:txBody>
+          <a:bodyPr/>
+          <a:p/>
+        </p:txBody>
       </p:sp>
       <p:pic>
         <p:nvPicPr>
@@ -24305,6 +24625,10 @@
             </a:outerShdw>
           </a:effectLst>
         </p:spPr>
+        <p:txBody>
+          <a:bodyPr/>
+          <a:p/>
+        </p:txBody>
       </p:sp>
       <p:sp>
         <p:nvSpPr>
@@ -24437,6 +24761,10 @@
             <a:prstDash val="solid"/>
           </a:ln>
         </p:spPr>
+        <p:txBody>
+          <a:bodyPr/>
+          <a:p/>
+        </p:txBody>
       </p:sp>
       <p:pic>
         <p:nvPicPr>
@@ -24495,6 +24823,10 @@
             </a:outerShdw>
           </a:effectLst>
         </p:spPr>
+        <p:txBody>
+          <a:bodyPr/>
+          <a:p/>
+        </p:txBody>
       </p:sp>
       <p:sp>
         <p:nvSpPr>
@@ -24627,6 +24959,10 @@
             <a:prstDash val="solid"/>
           </a:ln>
         </p:spPr>
+        <p:txBody>
+          <a:bodyPr/>
+          <a:p/>
+        </p:txBody>
       </p:sp>
       <p:pic>
         <p:nvPicPr>
@@ -24685,6 +25021,10 @@
             </a:outerShdw>
           </a:effectLst>
         </p:spPr>
+        <p:txBody>
+          <a:bodyPr/>
+          <a:p/>
+        </p:txBody>
       </p:sp>
       <p:sp>
         <p:nvSpPr>
@@ -24817,6 +25157,10 @@
             <a:prstDash val="solid"/>
           </a:ln>
         </p:spPr>
+        <p:txBody>
+          <a:bodyPr/>
+          <a:p/>
+        </p:txBody>
       </p:sp>
       <p:pic>
         <p:nvPicPr>
@@ -24875,6 +25219,10 @@
             </a:outerShdw>
           </a:effectLst>
         </p:spPr>
+        <p:txBody>
+          <a:bodyPr/>
+          <a:p/>
+        </p:txBody>
       </p:sp>
       <p:sp>
         <p:nvSpPr>
@@ -25007,6 +25355,10 @@
             <a:prstDash val="solid"/>
           </a:ln>
         </p:spPr>
+        <p:txBody>
+          <a:bodyPr/>
+          <a:p/>
+        </p:txBody>
       </p:sp>
       <p:pic>
         <p:nvPicPr>
@@ -25174,7 +25526,7 @@
                 <a:ea typeface="Calibri" pitchFamily="34" charset="-122"/>
                 <a:cs typeface="Calibri" pitchFamily="34" charset="-120"/>
               </a:rPr>
-              <a:t>Consolidado de las 10 tablas de la capa Silver (~89,3 M de filas) y las entidades del Modelo Estrella en Gold (&gt; 14,5 GB)</a:t>
+              <a:t>Consolidado de las 10 tablas de la capa Silver (~98,6 M de filas) y las entidades del Modelo Estrella en Gold (~16 GB)</a:t>
             </a:r>
             <a:endParaRPr lang="en-US" sz="1300" dirty="0"/>
           </a:p>
@@ -25607,7 +25959,7 @@
                           <a:ea typeface="Calibri" pitchFamily="34" charset="-122"/>
                           <a:cs typeface="Calibri" pitchFamily="34" charset="-120"/>
                         </a:rPr>
-                        <a:t>40.532.448</a:t>
+                        <a:t>40.595.893</a:t>
                       </a:r>
                       <a:endParaRPr lang="en-US" sz="1000" dirty="0">
                         <a:latin typeface="Calibri" charset="0"/>
@@ -25675,7 +26027,7 @@
                           <a:ea typeface="Calibri" pitchFamily="34" charset="-122"/>
                           <a:cs typeface="Calibri" pitchFamily="34" charset="-120"/>
                         </a:rPr>
-                        <a:t>4.998 MB</a:t>
+                        <a:t>5.854 MB</a:t>
                       </a:r>
                       <a:endParaRPr lang="en-US" sz="1000" dirty="0">
                         <a:latin typeface="Calibri" charset="0"/>
@@ -25949,7 +26301,7 @@
                           <a:ea typeface="Calibri" pitchFamily="34" charset="-122"/>
                           <a:cs typeface="Calibri" pitchFamily="34" charset="-120"/>
                         </a:rPr>
-                        <a:t>1.967 MB</a:t>
+                        <a:t>2.865 MB</a:t>
                       </a:r>
                       <a:endParaRPr lang="en-US" sz="1000" dirty="0">
                         <a:latin typeface="Calibri" charset="0"/>
@@ -26155,7 +26507,7 @@
                           <a:ea typeface="Calibri" pitchFamily="34" charset="-122"/>
                           <a:cs typeface="Calibri" pitchFamily="34" charset="-120"/>
                         </a:rPr>
-                        <a:t>6.478.709</a:t>
+                        <a:t>6.502.252</a:t>
                       </a:r>
                       <a:endParaRPr lang="en-US" sz="1000" dirty="0">
                         <a:latin typeface="Calibri" charset="0"/>
@@ -26223,7 +26575,7 @@
                           <a:ea typeface="Calibri" pitchFamily="34" charset="-122"/>
                           <a:cs typeface="Calibri" pitchFamily="34" charset="-120"/>
                         </a:rPr>
-                        <a:t>795 MB</a:t>
+                        <a:t>798 MB</a:t>
                       </a:r>
                       <a:endParaRPr lang="en-US" sz="1000" dirty="0">
                         <a:latin typeface="Calibri" charset="0"/>
@@ -26429,7 +26781,7 @@
                           <a:ea typeface="Calibri" pitchFamily="34" charset="-122"/>
                           <a:cs typeface="Calibri" pitchFamily="34" charset="-120"/>
                         </a:rPr>
-                        <a:t>6.411.799</a:t>
+                        <a:t>6.426.136</a:t>
                       </a:r>
                       <a:endParaRPr lang="en-US" sz="1000" dirty="0">
                         <a:latin typeface="Calibri" charset="0"/>
@@ -26497,7 +26849,7 @@
                           <a:ea typeface="Calibri" pitchFamily="34" charset="-122"/>
                           <a:cs typeface="Calibri" pitchFamily="34" charset="-120"/>
                         </a:rPr>
-                        <a:t>986 MB</a:t>
+                        <a:t>988 MB</a:t>
                       </a:r>
                       <a:endParaRPr lang="en-US" sz="1000" dirty="0">
                         <a:latin typeface="Calibri" charset="0"/>
@@ -26703,7 +27055,7 @@
                           <a:ea typeface="Calibri" pitchFamily="34" charset="-122"/>
                           <a:cs typeface="Calibri" pitchFamily="34" charset="-120"/>
                         </a:rPr>
-                        <a:t>~6.210.000</a:t>
+                        <a:t>7.301.698</a:t>
                       </a:r>
                       <a:endParaRPr lang="en-US" sz="1000" dirty="0">
                         <a:latin typeface="Calibri" charset="0"/>
@@ -26771,7 +27123,7 @@
                           <a:ea typeface="Calibri" pitchFamily="34" charset="-122"/>
                           <a:cs typeface="Calibri" pitchFamily="34" charset="-120"/>
                         </a:rPr>
-                        <a:t>420 MB</a:t>
+                        <a:t>741 MB</a:t>
                       </a:r>
                       <a:endParaRPr lang="en-US" sz="1000" dirty="0">
                         <a:latin typeface="Calibri" charset="0"/>
@@ -26977,7 +27329,7 @@
                           <a:ea typeface="Calibri" pitchFamily="34" charset="-122"/>
                           <a:cs typeface="Calibri" pitchFamily="34" charset="-120"/>
                         </a:rPr>
-                        <a:t>5.844.569</a:t>
+                        <a:t>5.858.206</a:t>
                       </a:r>
                       <a:endParaRPr lang="en-US" sz="1000" dirty="0">
                         <a:latin typeface="Calibri" charset="0"/>
@@ -27045,7 +27397,7 @@
                           <a:ea typeface="Calibri" pitchFamily="34" charset="-122"/>
                           <a:cs typeface="Calibri" pitchFamily="34" charset="-120"/>
                         </a:rPr>
-                        <a:t>1.108 MB</a:t>
+                        <a:t>1.110 MB</a:t>
                       </a:r>
                       <a:endParaRPr lang="en-US" sz="1000" dirty="0">
                         <a:latin typeface="Calibri" charset="0"/>
@@ -27251,7 +27603,7 @@
                           <a:ea typeface="Calibri" pitchFamily="34" charset="-122"/>
                           <a:cs typeface="Calibri" pitchFamily="34" charset="-120"/>
                         </a:rPr>
-                        <a:t>~5.480.000</a:t>
+                        <a:t>13.337.269</a:t>
                       </a:r>
                       <a:endParaRPr lang="en-US" sz="1000" dirty="0">
                         <a:latin typeface="Calibri" charset="0"/>
@@ -27319,7 +27671,7 @@
                           <a:ea typeface="Calibri" pitchFamily="34" charset="-122"/>
                           <a:cs typeface="Calibri" pitchFamily="34" charset="-120"/>
                         </a:rPr>
-                        <a:t>385 MB</a:t>
+                        <a:t>1.299 MB</a:t>
                       </a:r>
                       <a:endParaRPr lang="en-US" sz="1000" dirty="0">
                         <a:latin typeface="Calibri" charset="0"/>
@@ -27525,7 +27877,7 @@
                           <a:ea typeface="Calibri" pitchFamily="34" charset="-122"/>
                           <a:cs typeface="Calibri" pitchFamily="34" charset="-120"/>
                         </a:rPr>
-                        <a:t>3.010.451</a:t>
+                        <a:t>3.015.712</a:t>
                       </a:r>
                       <a:endParaRPr lang="en-US" sz="1000" dirty="0">
                         <a:latin typeface="Calibri" charset="0"/>
@@ -27593,7 +27945,7 @@
                           <a:ea typeface="Calibri" pitchFamily="34" charset="-122"/>
                           <a:cs typeface="Calibri" pitchFamily="34" charset="-120"/>
                         </a:rPr>
-                        <a:t>498 MB</a:t>
+                        <a:t>499 MB</a:t>
                       </a:r>
                       <a:endParaRPr lang="en-US" sz="1000" dirty="0">
                         <a:latin typeface="Calibri" charset="0"/>
@@ -27799,7 +28151,7 @@
                           <a:ea typeface="Calibri" pitchFamily="34" charset="-122"/>
                           <a:cs typeface="Calibri" pitchFamily="34" charset="-120"/>
                         </a:rPr>
-                        <a:t>~215.000</a:t>
+                        <a:t>484.343</a:t>
                       </a:r>
                       <a:endParaRPr lang="en-US" sz="1000" dirty="0">
                         <a:latin typeface="Calibri" charset="0"/>
@@ -27867,7 +28219,7 @@
                           <a:ea typeface="Calibri" pitchFamily="34" charset="-122"/>
                           <a:cs typeface="Calibri" pitchFamily="34" charset="-120"/>
                         </a:rPr>
-                        <a:t>18 MB</a:t>
+                        <a:t>36 MB</a:t>
                       </a:r>
                       <a:endParaRPr lang="en-US" sz="1000" dirty="0">
                         <a:latin typeface="Calibri" charset="0"/>
@@ -28073,7 +28425,7 @@
                           <a:ea typeface="Calibri" pitchFamily="34" charset="-122"/>
                           <a:cs typeface="Calibri" pitchFamily="34" charset="-120"/>
                         </a:rPr>
-                        <a:t>120.107</a:t>
+                        <a:t>120.108</a:t>
                       </a:r>
                       <a:endParaRPr lang="en-US" sz="1000" dirty="0">
                         <a:latin typeface="Calibri" charset="0"/>
@@ -28141,7 +28493,7 @@
                           <a:ea typeface="Calibri" pitchFamily="34" charset="-122"/>
                           <a:cs typeface="Calibri" pitchFamily="34" charset="-120"/>
                         </a:rPr>
-                        <a:t>14 MB</a:t>
+                        <a:t>16 MB</a:t>
                       </a:r>
                       <a:endParaRPr lang="en-US" sz="1000" dirty="0">
                         <a:latin typeface="Calibri" charset="0"/>
@@ -28347,7 +28699,7 @@
                           <a:ea typeface="Calibri" pitchFamily="34" charset="-122"/>
                           <a:cs typeface="Calibri" pitchFamily="34" charset="-120"/>
                         </a:rPr>
-                        <a:t>~89.303.083</a:t>
+                        <a:t>98.641.617</a:t>
                       </a:r>
                       <a:endParaRPr lang="en-US" sz="1000" dirty="0">
                         <a:latin typeface="Calibri" charset="0"/>
@@ -28415,7 +28767,7 @@
                           <a:ea typeface="Calibri" pitchFamily="34" charset="-122"/>
                           <a:cs typeface="Calibri" pitchFamily="34" charset="-120"/>
                         </a:rPr>
-                        <a:t>~11.189 MB</a:t>
+                        <a:t>14.206 MB</a:t>
                       </a:r>
                       <a:endParaRPr lang="en-US" sz="1000" dirty="0">
                         <a:latin typeface="Calibri" charset="0"/>
@@ -28927,7 +29279,7 @@
                           <a:ea typeface="Calibri" pitchFamily="34" charset="-122"/>
                           <a:cs typeface="Calibri" pitchFamily="34" charset="-120"/>
                         </a:rPr>
-                        <a:t>~4,5M – 5,8M</a:t>
+                        <a:t>2.967.681</a:t>
                       </a:r>
                       <a:endParaRPr lang="en-US" sz="1000" dirty="0">
                         <a:latin typeface="Calibri" charset="0"/>
@@ -28995,7 +29347,7 @@
                           <a:ea typeface="Calibri" pitchFamily="34" charset="-122"/>
                           <a:cs typeface="Calibri" pitchFamily="34" charset="-120"/>
                         </a:rPr>
-                        <a:t>~2.450 MB</a:t>
+                        <a:t>570 MB</a:t>
                       </a:r>
                       <a:endParaRPr lang="en-US" sz="1000" dirty="0">
                         <a:latin typeface="Calibri" charset="0"/>
@@ -29201,7 +29553,7 @@
                           <a:ea typeface="Calibri" pitchFamily="34" charset="-122"/>
                           <a:cs typeface="Calibri" pitchFamily="34" charset="-120"/>
                         </a:rPr>
-                        <a:t>3.010.452</a:t>
+                        <a:t>3.015.713</a:t>
                       </a:r>
                       <a:endParaRPr lang="en-US" sz="1000" dirty="0">
                         <a:latin typeface="Calibri" charset="0"/>
@@ -29269,7 +29621,7 @@
                           <a:ea typeface="Calibri" pitchFamily="34" charset="-122"/>
                           <a:cs typeface="Calibri" pitchFamily="34" charset="-120"/>
                         </a:rPr>
-                        <a:t>758 MB</a:t>
+                        <a:t>1.476 MB</a:t>
                       </a:r>
                       <a:endParaRPr lang="en-US" sz="1000" dirty="0">
                         <a:latin typeface="Calibri" charset="0"/>
@@ -29475,7 +29827,7 @@
                           <a:ea typeface="Calibri" pitchFamily="34" charset="-122"/>
                           <a:cs typeface="Calibri" pitchFamily="34" charset="-120"/>
                         </a:rPr>
-                        <a:t>120.108</a:t>
+                        <a:t>120.109</a:t>
                       </a:r>
                       <a:endParaRPr lang="en-US" sz="1000" dirty="0">
                         <a:latin typeface="Calibri" charset="0"/>
@@ -29543,7 +29895,7 @@
                           <a:ea typeface="Calibri" pitchFamily="34" charset="-122"/>
                           <a:cs typeface="Calibri" pitchFamily="34" charset="-120"/>
                         </a:rPr>
-                        <a:t>15 MB</a:t>
+                        <a:t>19 MB</a:t>
                       </a:r>
                       <a:endParaRPr lang="en-US" sz="1000" dirty="0">
                         <a:latin typeface="Calibri" charset="0"/>
@@ -29749,7 +30101,7 @@
                           <a:ea typeface="Calibri" pitchFamily="34" charset="-122"/>
                           <a:cs typeface="Calibri" pitchFamily="34" charset="-120"/>
                         </a:rPr>
-                        <a:t>47.848</a:t>
+                        <a:t>47.847</a:t>
                       </a:r>
                       <a:endParaRPr lang="en-US" sz="1000" dirty="0">
                         <a:latin typeface="Calibri" charset="0"/>
@@ -29817,7 +30169,7 @@
                           <a:ea typeface="Calibri" pitchFamily="34" charset="-122"/>
                           <a:cs typeface="Calibri" pitchFamily="34" charset="-120"/>
                         </a:rPr>
-                        <a:t>4 MB</a:t>
+                        <a:t>6 MB</a:t>
                       </a:r>
                       <a:endParaRPr lang="en-US" sz="1000" dirty="0">
                         <a:latin typeface="Calibri" charset="0"/>
@@ -30297,7 +30649,7 @@
                           <a:ea typeface="Calibri" pitchFamily="34" charset="-122"/>
                           <a:cs typeface="Calibri" pitchFamily="34" charset="-120"/>
                         </a:rPr>
-                        <a:t>~150</a:t>
+                        <a:t>313</a:t>
                       </a:r>
                       <a:endParaRPr lang="en-US" sz="1000" dirty="0">
                         <a:latin typeface="Calibri" charset="0"/>
@@ -30571,7 +30923,7 @@
                           <a:ea typeface="Calibri" pitchFamily="34" charset="-122"/>
                           <a:cs typeface="Calibri" pitchFamily="34" charset="-120"/>
                         </a:rPr>
-                        <a:t>114</a:t>
+                        <a:t>115</a:t>
                       </a:r>
                       <a:endParaRPr lang="en-US" sz="1000" dirty="0">
                         <a:latin typeface="Calibri" charset="0"/>
@@ -30845,7 +31197,7 @@
                           <a:ea typeface="Calibri" pitchFamily="34" charset="-122"/>
                           <a:cs typeface="Calibri" pitchFamily="34" charset="-120"/>
                         </a:rPr>
-                        <a:t>~1.850.000</a:t>
+                        <a:t>690.454</a:t>
                       </a:r>
                       <a:endParaRPr lang="en-US" sz="1000" dirty="0">
                         <a:latin typeface="Calibri" charset="0"/>
@@ -30913,7 +31265,7 @@
                           <a:ea typeface="Calibri" pitchFamily="34" charset="-122"/>
                           <a:cs typeface="Calibri" pitchFamily="34" charset="-120"/>
                         </a:rPr>
-                        <a:t>165 MB</a:t>
+                        <a:t>131 MB</a:t>
                       </a:r>
                       <a:endParaRPr lang="en-US" sz="1000" dirty="0">
                         <a:latin typeface="Calibri" charset="0"/>
@@ -31119,7 +31471,7 @@
                           <a:ea typeface="Calibri" pitchFamily="34" charset="-122"/>
                           <a:cs typeface="Calibri" pitchFamily="34" charset="-120"/>
                         </a:rPr>
-                        <a:t>~10.477</a:t>
+                        <a:t>4.711</a:t>
                       </a:r>
                       <a:endParaRPr lang="en-US" sz="1000" dirty="0">
                         <a:latin typeface="Calibri" charset="0"/>
@@ -31187,7 +31539,7 @@
                           <a:ea typeface="Calibri" pitchFamily="34" charset="-122"/>
                           <a:cs typeface="Calibri" pitchFamily="34" charset="-120"/>
                         </a:rPr>
-                        <a:t>&lt; 3 MB</a:t>
+                        <a:t>&lt; 1 MB</a:t>
                       </a:r>
                       <a:endParaRPr lang="en-US" sz="1000" dirty="0">
                         <a:latin typeface="Calibri" charset="0"/>
@@ -31344,6 +31696,10 @@
             </a:outerShdw>
           </a:effectLst>
         </p:spPr>
+        <p:txBody>
+          <a:bodyPr/>
+          <a:p/>
+        </p:txBody>
       </p:sp>
       <p:sp>
         <p:nvSpPr>
@@ -31401,7 +31757,7 @@
                 <a:ea typeface="Calibri" pitchFamily="34" charset="-122"/>
                 <a:cs typeface="Calibri" pitchFamily="34" charset="-120"/>
               </a:rPr>
-              <a:t>Huella Total &gt; 14,5 GB en PostgreSQL 16 (Meta: &gt; 3,0 GB)</a:t>
+              <a:t>Huella Total ~16 GB en PostgreSQL 16 (Meta: &gt; 3,0 GB)</a:t>
             </a:r>
             <a:endParaRPr lang="en-US" sz="1000" dirty="0"/>
           </a:p>
@@ -31422,7 +31778,7 @@
                 <a:ea typeface="Calibri" pitchFamily="34" charset="-122"/>
                 <a:cs typeface="Calibri" pitchFamily="34" charset="-120"/>
               </a:rPr>
-              <a:t>Supera en casi 500% el umbral mínimo de almacenamiento físico exigido.</a:t>
+              <a:t>Supera más de 5 veces el umbral mínimo de almacenamiento físico exigido.</a:t>
             </a:r>
             <a:endParaRPr lang="en-US" sz="1000" dirty="0"/>
           </a:p>
@@ -31443,7 +31799,7 @@
                 <a:ea typeface="Calibri" pitchFamily="34" charset="-122"/>
                 <a:cs typeface="Calibri" pitchFamily="34" charset="-120"/>
               </a:rPr>
-              <a:t>Al modelar dim_lanzamiento por perfil (~150 filas en vez de 5,8M), Power BI opera en memoria con máxima compresión.</a:t>
+              <a:t>Al modelar dim_lanzamiento por perfil (313 filas en vez de 5,8M), Power BI opera en memoria con máxima compresión.</a:t>
             </a:r>
             <a:endParaRPr lang="en-US" sz="1000" dirty="0"/>
           </a:p>
